--- a/Day-7/Kafka_Streams.pptx
+++ b/Day-7/Kafka_Streams.pptx
@@ -46,8 +46,7 @@
     <p:sldId id="286" r:id="rId40"/>
     <p:sldId id="287" r:id="rId41"/>
     <p:sldId id="288" r:id="rId42"/>
-    <p:sldId id="289" r:id="rId43"/>
-    <p:sldId id="290" r:id="rId44"/>
+    <p:sldId id="290" r:id="rId43"/>
   </p:sldIdLst>
   <p:sldSz cx="9144000" cy="6858000" type="screen4x3"/>
   <p:notesSz cx="6858000" cy="9144000"/>
@@ -221,6 +220,13 @@
             <a:schemeClr val="lt1"/>
           </a:fontRef>
         </p:style>
+        <p:txBody>
+          <a:bodyPr/>
+          <a:lstStyle/>
+          <a:p>
+            <a:endParaRPr lang="en-IN"/>
+          </a:p>
+        </p:txBody>
       </p:sp>
       <p:sp>
         <p:nvSpPr>
@@ -6662,6 +6668,13 @@
             <a:schemeClr val="lt1"/>
           </a:fontRef>
         </p:style>
+        <p:txBody>
+          <a:bodyPr/>
+          <a:lstStyle/>
+          <a:p>
+            <a:endParaRPr lang="en-IN"/>
+          </a:p>
+        </p:txBody>
       </p:sp>
       <p:sp>
         <p:nvSpPr>
@@ -6798,7 +6811,7 @@
           <a:p>
             <a:fld id="{5BCAD085-E8A6-8845-BD4E-CB4CCA059FC4}" type="datetimeFigureOut">
               <a:rPr lang="en-US" smtClean="0"/>
-              <a:t>5/24/2026</a:t>
+              <a:t>5/26/2026</a:t>
             </a:fld>
             <a:endParaRPr lang="en-US"/>
           </a:p>
@@ -7005,7 +7018,7 @@
           <a:p>
             <a:fld id="{5BCAD085-E8A6-8845-BD4E-CB4CCA059FC4}" type="datetimeFigureOut">
               <a:rPr lang="en-US" smtClean="0"/>
-              <a:t>5/24/2026</a:t>
+              <a:t>5/26/2026</a:t>
             </a:fld>
             <a:endParaRPr lang="en-US"/>
           </a:p>
@@ -7185,7 +7198,7 @@
           <a:p>
             <a:fld id="{5BCAD085-E8A6-8845-BD4E-CB4CCA059FC4}" type="datetimeFigureOut">
               <a:rPr lang="en-US" smtClean="0"/>
-              <a:t>5/24/2026</a:t>
+              <a:t>5/26/2026</a:t>
             </a:fld>
             <a:endParaRPr lang="en-US"/>
           </a:p>
@@ -7390,7 +7403,7 @@
           <a:p>
             <a:fld id="{5BCAD085-E8A6-8845-BD4E-CB4CCA059FC4}" type="datetimeFigureOut">
               <a:rPr lang="en-US" smtClean="0"/>
-              <a:t>5/24/2026</a:t>
+              <a:t>5/26/2026</a:t>
             </a:fld>
             <a:endParaRPr lang="en-US"/>
           </a:p>
@@ -14128,7 +14141,7 @@
           <a:p>
             <a:fld id="{5BCAD085-E8A6-8845-BD4E-CB4CCA059FC4}" type="datetimeFigureOut">
               <a:rPr lang="en-US" smtClean="0"/>
-              <a:t>5/24/2026</a:t>
+              <a:t>5/26/2026</a:t>
             </a:fld>
             <a:endParaRPr lang="en-US"/>
           </a:p>
@@ -14402,7 +14415,7 @@
           <a:p>
             <a:fld id="{5BCAD085-E8A6-8845-BD4E-CB4CCA059FC4}" type="datetimeFigureOut">
               <a:rPr lang="en-US" smtClean="0"/>
-              <a:t>5/24/2026</a:t>
+              <a:t>5/26/2026</a:t>
             </a:fld>
             <a:endParaRPr lang="en-US"/>
           </a:p>
@@ -14805,7 +14818,7 @@
           <a:p>
             <a:fld id="{5BCAD085-E8A6-8845-BD4E-CB4CCA059FC4}" type="datetimeFigureOut">
               <a:rPr lang="en-US" smtClean="0"/>
-              <a:t>5/24/2026</a:t>
+              <a:t>5/26/2026</a:t>
             </a:fld>
             <a:endParaRPr lang="en-US"/>
           </a:p>
@@ -14923,7 +14936,7 @@
           <a:p>
             <a:fld id="{5BCAD085-E8A6-8845-BD4E-CB4CCA059FC4}" type="datetimeFigureOut">
               <a:rPr lang="en-US" smtClean="0"/>
-              <a:t>5/24/2026</a:t>
+              <a:t>5/26/2026</a:t>
             </a:fld>
             <a:endParaRPr lang="en-US"/>
           </a:p>
@@ -15018,7 +15031,7 @@
           <a:p>
             <a:fld id="{5BCAD085-E8A6-8845-BD4E-CB4CCA059FC4}" type="datetimeFigureOut">
               <a:rPr lang="en-US" smtClean="0"/>
-              <a:t>5/24/2026</a:t>
+              <a:t>5/26/2026</a:t>
             </a:fld>
             <a:endParaRPr lang="en-US"/>
           </a:p>
@@ -15310,7 +15323,7 @@
           <a:p>
             <a:fld id="{5BCAD085-E8A6-8845-BD4E-CB4CCA059FC4}" type="datetimeFigureOut">
               <a:rPr lang="en-US" smtClean="0"/>
-              <a:t>5/24/2026</a:t>
+              <a:t>5/26/2026</a:t>
             </a:fld>
             <a:endParaRPr lang="en-US"/>
           </a:p>
@@ -15590,7 +15603,7 @@
           <a:p>
             <a:fld id="{5BCAD085-E8A6-8845-BD4E-CB4CCA059FC4}" type="datetimeFigureOut">
               <a:rPr lang="en-US" smtClean="0"/>
-              <a:t>5/24/2026</a:t>
+              <a:t>5/26/2026</a:t>
             </a:fld>
             <a:endParaRPr lang="en-US"/>
           </a:p>
@@ -15843,7 +15856,7 @@
           <a:p>
             <a:fld id="{5BCAD085-E8A6-8845-BD4E-CB4CCA059FC4}" type="datetimeFigureOut">
               <a:rPr lang="en-US" smtClean="0"/>
-              <a:t>5/24/2026</a:t>
+              <a:t>5/26/2026</a:t>
             </a:fld>
             <a:endParaRPr lang="en-US"/>
           </a:p>
@@ -23698,108 +23711,6 @@
           <a:lstStyle/>
           <a:p>
             <a:r>
-              <a:t>Common Interview Questions</a:t>
-            </a:r>
-          </a:p>
-        </p:txBody>
-      </p:sp>
-      <p:sp>
-        <p:nvSpPr>
-          <p:cNvPr id="3" name="Content Placeholder 2"/>
-          <p:cNvSpPr>
-            <a:spLocks noGrp="1"/>
-          </p:cNvSpPr>
-          <p:nvPr>
-            <p:ph idx="1"/>
-          </p:nvPr>
-        </p:nvSpPr>
-        <p:spPr/>
-        <p:txBody>
-          <a:bodyPr/>
-          <a:lstStyle/>
-          <a:p>
-            <a:pPr>
-              <a:defRPr sz="2100"/>
-            </a:pPr>
-            <a:r>
-              <a:t>Difference between KStream and KTable?</a:t>
-            </a:r>
-          </a:p>
-          <a:p>
-            <a:pPr>
-              <a:defRPr sz="2100"/>
-            </a:pPr>
-            <a:r>
-              <a:t>What are state stores?</a:t>
-            </a:r>
-          </a:p>
-          <a:p>
-            <a:pPr>
-              <a:defRPr sz="2100"/>
-            </a:pPr>
-            <a:r>
-              <a:t>How windowing works?</a:t>
-            </a:r>
-          </a:p>
-          <a:p>
-            <a:pPr>
-              <a:defRPr sz="2100"/>
-            </a:pPr>
-            <a:r>
-              <a:t>Explain exactly-once semantics</a:t>
-            </a:r>
-          </a:p>
-          <a:p>
-            <a:pPr>
-              <a:defRPr sz="2100"/>
-            </a:pPr>
-            <a:r>
-              <a:t>How Kafka Streams ensures fault tolerance?</a:t>
-            </a:r>
-          </a:p>
-        </p:txBody>
-      </p:sp>
-    </p:spTree>
-  </p:cSld>
-  <p:clrMapOvr>
-    <a:masterClrMapping/>
-  </p:clrMapOvr>
-</p:sld>
-</file>
-
-<file path=ppt/slides/slide43.xml><?xml version="1.0" encoding="utf-8"?>
-<p:sld xmlns:a="http://schemas.openxmlformats.org/drawingml/2006/main" xmlns:r="http://schemas.openxmlformats.org/officeDocument/2006/relationships" xmlns:p="http://schemas.openxmlformats.org/presentationml/2006/main">
-  <p:cSld>
-    <p:spTree>
-      <p:nvGrpSpPr>
-        <p:cNvPr id="1" name=""/>
-        <p:cNvGrpSpPr/>
-        <p:nvPr/>
-      </p:nvGrpSpPr>
-      <p:grpSpPr>
-        <a:xfrm>
-          <a:off x="0" y="0"/>
-          <a:ext cx="0" cy="0"/>
-          <a:chOff x="0" y="0"/>
-          <a:chExt cx="0" cy="0"/>
-        </a:xfrm>
-      </p:grpSpPr>
-      <p:sp>
-        <p:nvSpPr>
-          <p:cNvPr id="2" name="Title 1"/>
-          <p:cNvSpPr>
-            <a:spLocks noGrp="1"/>
-          </p:cNvSpPr>
-          <p:nvPr>
-            <p:ph type="title"/>
-          </p:nvPr>
-        </p:nvSpPr>
-        <p:spPr/>
-        <p:txBody>
-          <a:bodyPr/>
-          <a:lstStyle/>
-          <a:p>
-            <a:r>
               <a:t>Summary</a:t>
             </a:r>
           </a:p>
